--- a/downloads/editorial-magazine-deck.pptx
+++ b/downloads/editorial-magazine-deck.pptx
@@ -3348,7 +3348,7 @@
                 </a:solidFill>
                 <a:latin typeface="Georgia"/>
               </a:rPr>
-              <a:t>“אנחנו מאמינים שעיצוב טוב הוא לא תוספת — הוא השפה שבה המותג שלכם מדבר אל העולם. כל פרט, מהצבע ועד הרווח הלבן, מספר את הסיפור שלכם.”</a:t>
+              <a:t>"אנחנו מאמינים שעיצוב טוב הוא לא תוספת — הוא השפה שבה המותג שלכם מדבר אל העולם. כל פרט, מהצבע ועד הרווח הלבן, מספר את הסיפור שלכם."</a:t>
             </a:r>
           </a:p>
         </p:txBody>
@@ -3666,7 +3666,7 @@
                 </a:solidFill>
                 <a:latin typeface="Calibri"/>
               </a:rPr>
-              <a:t>חוויה שמרגישה כמו פרימיום, מהקצה עד הקצה</a:t>
+              <a:t>חוויית פרימיום מקצה לקצה</a:t>
             </a:r>
           </a:p>
         </p:txBody>
@@ -4133,7 +4133,7 @@
                 </a:solidFill>
                 <a:latin typeface="Calibri"/>
               </a:rPr>
-              <a:t>שנות ניסיון משותפות</a:t>
+              <a:t>שנות ניסיון מצטבר</a:t>
             </a:r>
           </a:p>
         </p:txBody>
